--- a/Talleres/Laboratorio SECOP II-20260920/Diapositivas Sustentacion.pptx
+++ b/Talleres/Laboratorio SECOP II-20260920/Diapositivas Sustentacion.pptx
@@ -5479,7 +5479,7 @@
       </p:sp>
       <p:pic>
         <p:nvPicPr>
-          <p:cNvPr id="3" name="Picture 2" descr="fig03_celda37.png"/>
+          <p:cNvPr id="3" name="Picture 2" descr="f3_celda37.png"/>
           <p:cNvPicPr>
             <a:picLocks noChangeAspect="1"/>
           </p:cNvPicPr>
@@ -5709,7 +5709,7 @@
       </p:sp>
       <p:pic>
         <p:nvPicPr>
-          <p:cNvPr id="3" name="Picture 2" descr="fig04_celda39.png"/>
+          <p:cNvPr id="3" name="Picture 2" descr="f4_celda39.png"/>
           <p:cNvPicPr>
             <a:picLocks noChangeAspect="1"/>
           </p:cNvPicPr>
@@ -5939,7 +5939,7 @@
       </p:sp>
       <p:pic>
         <p:nvPicPr>
-          <p:cNvPr id="3" name="Picture 2" descr="fig05_celda41.png"/>
+          <p:cNvPr id="3" name="Picture 2" descr="f5_celda41.png"/>
           <p:cNvPicPr>
             <a:picLocks noChangeAspect="1"/>
           </p:cNvPicPr>
@@ -7169,7 +7169,7 @@
       </p:sp>
       <p:pic>
         <p:nvPicPr>
-          <p:cNvPr id="3" name="Picture 2" descr="fig07_celda54.png"/>
+          <p:cNvPr id="3" name="Picture 2" descr="f7_celda54.png"/>
           <p:cNvPicPr>
             <a:picLocks noChangeAspect="1"/>
           </p:cNvPicPr>
